--- a/public/fun/pack/pptx/wedding/결혼식_35_감사·답례중심_밤줍던산.pptx
+++ b/public/fun/pack/pptx/wedding/결혼식_35_감사·답례중심_밤줍던산.pptx
@@ -3286,6 +3286,14 @@
 <file path=ppt/slides/slide1.xml><?xml version="1.0" encoding="utf-8"?>
 <p:sld xmlns:a="http://schemas.openxmlformats.org/drawingml/2006/main" xmlns:p="http://schemas.openxmlformats.org/presentationml/2006/main" xmlns:r="http://schemas.openxmlformats.org/officeDocument/2006/relationships">
   <p:cSld>
+    <p:bg>
+      <p:bgPr>
+        <a:solidFill>
+          <a:srgbClr val="FBF4EC"/>
+        </a:solidFill>
+        <a:effectLst/>
+      </p:bgPr>
+    </p:bg>
     <p:spTree>
       <p:nvGrpSpPr>
         <p:cNvPr id="1" name=""/>
@@ -3293,30 +3301,119 @@
         <p:nvPr/>
       </p:nvGrpSpPr>
       <p:grpSpPr/>
-      <p:pic>
-        <p:nvPicPr>
-          <p:cNvPr id="3" name="표지 그림" descr="wedding-35.jpg"/>
-          <p:cNvPicPr>
-            <a:picLocks noChangeAspect="1"/>
-          </p:cNvPicPr>
+      <p:sp>
+        <p:nvSpPr>
+          <p:cNvPr id="3" name="사진 자리"/>
+          <p:cNvSpPr/>
           <p:nvPr/>
-        </p:nvPicPr>
-        <p:blipFill>
-          <a:blip r:embed="rId2"/>
-          <a:stretch>
-            <a:fillRect/>
-          </a:stretch>
-        </p:blipFill>
-        <p:spPr>
-          <a:xfrm>
-            <a:off x="0" y="0"/>
-            <a:ext cx="12191695" cy="6858000"/>
+        </p:nvSpPr>
+        <p:spPr>
+          <a:xfrm>
+            <a:off x="7558851" y="685800"/>
+            <a:ext cx="3169840" cy="5486400"/>
+          </a:xfrm>
+          <a:prstGeom prst="round2SameRect">
+            <a:avLst>
+              <a:gd name="adj1" fmla="val 50000"/>
+              <a:gd name="adj2" fmla="val 0"/>
+            </a:avLst>
+          </a:prstGeom>
+          <a:solidFill>
+            <a:srgbClr val="EBCCAD"/>
+          </a:solidFill>
+          <a:ln>
+            <a:noFill/>
+          </a:ln>
+        </p:spPr>
+        <p:txBody>
+          <a:bodyPr rtlCol="0" anchor="ctr" wrap="square" lIns="54864" rIns="54864" tIns="27432" bIns="27432">
+            <a:noAutofit/>
+          </a:bodyPr>
+          <a:lstStyle/>
+          <a:p>
+            <a:pPr algn="ctr">
+              <a:lnSpc>
+                <a:spcPct val="100000"/>
+              </a:lnSpc>
+            </a:pPr>
+            <a:r>
+              <a:rPr sz="1400" b="0" i="0">
+                <a:solidFill>
+                  <a:srgbClr val="493827"/>
+                </a:solidFill>
+              </a:rPr>
+              <a:t>사진을 넣어 주세요</a:t>
+            </a:r>
+          </a:p>
+        </p:txBody>
+      </p:sp>
+      <p:sp>
+        <p:nvSpPr>
+          <p:cNvPr id="4" name="장식"/>
+          <p:cNvSpPr/>
+          <p:nvPr/>
+        </p:nvSpPr>
+        <p:spPr>
+          <a:xfrm>
+            <a:off x="6827349" y="4251960"/>
+            <a:ext cx="1005840" cy="1005840"/>
+          </a:xfrm>
+          <a:prstGeom prst="ellipse">
+            <a:avLst/>
+          </a:prstGeom>
+          <a:solidFill>
+            <a:srgbClr val="EBCCAD"/>
+          </a:solidFill>
+          <a:ln>
+            <a:noFill/>
+          </a:ln>
+        </p:spPr>
+        <p:txBody>
+          <a:bodyPr rtlCol="0" anchor="ctr"/>
+          <a:lstStyle/>
+          <a:p>
+            <a:pPr algn="ctr"/>
+          </a:p>
+        </p:txBody>
+      </p:sp>
+      <p:sp>
+        <p:nvSpPr>
+          <p:cNvPr id="5" name="라벨"/>
+          <p:cNvSpPr txBox="1"/>
+          <p:nvPr/>
+        </p:nvSpPr>
+        <p:spPr>
+          <a:xfrm>
+            <a:off x="822960" y="2148840"/>
+            <a:ext cx="5608179" cy="274320"/>
           </a:xfrm>
           <a:prstGeom prst="rect">
             <a:avLst/>
           </a:prstGeom>
-        </p:spPr>
-      </p:pic>
+          <a:noFill/>
+        </p:spPr>
+        <p:txBody>
+          <a:bodyPr wrap="square" lIns="54864" rIns="54864" tIns="27432" bIns="27432" anchor="t">
+            <a:noAutofit/>
+          </a:bodyPr>
+          <a:lstStyle/>
+          <a:p>
+            <a:pPr algn="l">
+              <a:lnSpc>
+                <a:spcPct val="115000"/>
+              </a:lnSpc>
+            </a:pPr>
+            <a:r>
+              <a:rPr sz="1000" b="1" i="0" spc="250">
+                <a:solidFill>
+                  <a:srgbClr val="26231F"/>
+                </a:solidFill>
+              </a:rPr>
+              <a:t>WEDDING</a:t>
+            </a:r>
+          </a:p>
+        </p:txBody>
+      </p:sp>
       <p:sp>
         <p:nvSpPr>
           <p:cNvPr id="2" name="Title 1"/>
@@ -3329,8 +3426,8 @@
         </p:nvSpPr>
         <p:spPr>
           <a:xfrm>
-            <a:off x="853418" y="2057400"/>
-            <a:ext cx="6095847" cy="1554480"/>
+            <a:off x="822960" y="2606040"/>
+            <a:ext cx="5608179" cy="1188720"/>
           </a:xfrm>
         </p:spPr>
         <p:txBody>
@@ -3347,7 +3444,7 @@
             <a:r>
               <a:rPr sz="3600" b="1" i="0">
                 <a:solidFill>
-                  <a:srgbClr val="3A2918"/>
+                  <a:srgbClr val="26231F"/>
                 </a:solidFill>
               </a:rPr>
               <a:t>저희 결혼합니다</a:t>
@@ -3357,14 +3454,14 @@
       </p:sp>
       <p:sp>
         <p:nvSpPr>
-          <p:cNvPr id="4" name="한 줄 문구"/>
+          <p:cNvPr id="6" name="한 줄 문구"/>
           <p:cNvSpPr txBox="1"/>
           <p:nvPr/>
         </p:nvSpPr>
         <p:spPr>
           <a:xfrm>
-            <a:off x="853418" y="3749039"/>
-            <a:ext cx="6095847" cy="822960"/>
+            <a:off x="822960" y="3886200"/>
+            <a:ext cx="5608179" cy="822960"/>
           </a:xfrm>
           <a:prstGeom prst="rect">
             <a:avLst/>
@@ -3383,9 +3480,9 @@
               </a:lnSpc>
             </a:pPr>
             <a:r>
-              <a:rPr sz="1700" b="0" i="1">
-                <a:solidFill>
-                  <a:srgbClr val="3A2918"/>
+              <a:rPr sz="1700" b="0" i="0">
+                <a:solidFill>
+                  <a:srgbClr val="26231F"/>
                 </a:solidFill>
               </a:rPr>
               <a:t>사진은 정리되는 대로 보내 드리겠습니다</a:t>
@@ -3395,14 +3492,14 @@
       </p:sp>
       <p:sp>
         <p:nvSpPr>
-          <p:cNvPr id="5" name="안내 문구"/>
+          <p:cNvPr id="7" name="안내 문구"/>
           <p:cNvSpPr txBox="1"/>
           <p:nvPr/>
         </p:nvSpPr>
         <p:spPr>
           <a:xfrm>
-            <a:off x="853418" y="4617720"/>
-            <a:ext cx="6095847" cy="914400"/>
+            <a:off x="822960" y="4754880"/>
+            <a:ext cx="5608179" cy="914400"/>
           </a:xfrm>
           <a:prstGeom prst="rect">
             <a:avLst/>
@@ -3423,7 +3520,7 @@
             <a:r>
               <a:rPr sz="1400" b="0" i="0">
                 <a:solidFill>
-                  <a:srgbClr val="666666"/>
+                  <a:srgbClr val="26231F"/>
                 </a:solidFill>
               </a:rPr>
               <a:t>신랑 이름 ♥ 신부 이름</a:t>
@@ -3438,10 +3535,10 @@
             <a:r>
               <a:rPr sz="1400" b="0" i="0">
                 <a:solidFill>
-                  <a:srgbClr val="666666"/>
+                  <a:srgbClr val="26231F"/>
                 </a:solidFill>
               </a:rPr>
-              <a:t>2027. 00. 00 · 예식장 이름</a:t>
+              <a:t>날짜 입력 · 예식장 이름</a:t>
             </a:r>
           </a:p>
         </p:txBody>
@@ -3460,7 +3557,7 @@
     <p:bg>
       <p:bgPr>
         <a:solidFill>
-          <a:srgbClr val="EFE0D2"/>
+          <a:srgbClr val="FBF4EC"/>
         </a:solidFill>
         <a:effectLst/>
       </p:bgPr>
@@ -3474,26 +3571,52 @@
       <p:grpSpPr/>
       <p:sp>
         <p:nvSpPr>
-          <p:cNvPr id="3" name="장식"/>
+          <p:cNvPr id="3" name="포인트"/>
           <p:cNvSpPr/>
           <p:nvPr/>
         </p:nvSpPr>
         <p:spPr>
           <a:xfrm>
-            <a:off x="274320" y="274320"/>
-            <a:ext cx="11643055" cy="6309360"/>
+            <a:off x="5958687" y="246888"/>
+            <a:ext cx="274320" cy="109728"/>
+          </a:xfrm>
+          <a:prstGeom prst="wave">
+            <a:avLst/>
+          </a:prstGeom>
+          <a:solidFill>
+            <a:srgbClr val="D8A879"/>
+          </a:solidFill>
+          <a:ln>
+            <a:noFill/>
+          </a:ln>
+        </p:spPr>
+        <p:txBody>
+          <a:bodyPr rtlCol="0" anchor="ctr"/>
+          <a:lstStyle/>
+          <a:p>
+            <a:pPr algn="ctr"/>
+          </a:p>
+        </p:txBody>
+      </p:sp>
+      <p:sp>
+        <p:nvSpPr>
+          <p:cNvPr id="4" name="장식"/>
+          <p:cNvSpPr/>
+          <p:nvPr/>
+        </p:nvSpPr>
+        <p:spPr>
+          <a:xfrm>
+            <a:off x="5684367" y="1572768"/>
+            <a:ext cx="822960" cy="22860"/>
           </a:xfrm>
           <a:prstGeom prst="rect">
             <a:avLst/>
           </a:prstGeom>
           <a:solidFill>
-            <a:srgbClr val="FFFFFF"/>
+            <a:srgbClr val="D8A879"/>
           </a:solidFill>
-          <a:ln w="25400">
-            <a:solidFill>
-              <a:srgbClr val="7B5732"/>
-            </a:solidFill>
-            <a:prstDash val="dash"/>
+          <a:ln>
+            <a:noFill/>
           </a:ln>
         </p:spPr>
         <p:txBody>
@@ -3506,19 +3629,19 @@
       </p:sp>
       <p:sp>
         <p:nvSpPr>
-          <p:cNvPr id="2" name="Title 1"/>
-          <p:cNvSpPr>
-            <a:spLocks noGrp="1"/>
-          </p:cNvSpPr>
-          <p:nvPr>
-            <p:ph type="title"/>
-          </p:nvPr>
-        </p:nvSpPr>
-        <p:spPr>
-          <a:xfrm>
-            <a:off x="777240" y="548640"/>
-            <a:ext cx="9357055" cy="822960"/>
-          </a:xfrm>
+          <p:cNvPr id="5" name="상단 라벨"/>
+          <p:cNvSpPr txBox="1"/>
+          <p:nvPr/>
+        </p:nvSpPr>
+        <p:spPr>
+          <a:xfrm>
+            <a:off x="640080" y="182880"/>
+            <a:ext cx="3657600" cy="274320"/>
+          </a:xfrm>
+          <a:prstGeom prst="rect">
+            <a:avLst/>
+          </a:prstGeom>
+          <a:noFill/>
         </p:spPr>
         <p:txBody>
           <a:bodyPr wrap="square" lIns="54864" rIns="54864" tIns="27432" bIns="27432" anchor="ctr">
@@ -3527,6 +3650,44 @@
           <a:lstStyle/>
           <a:p>
             <a:pPr algn="l">
+              <a:lnSpc>
+                <a:spcPct val="115000"/>
+              </a:lnSpc>
+            </a:pPr>
+            <a:r>
+              <a:rPr sz="800" b="1" i="0" spc="250">
+                <a:solidFill>
+                  <a:srgbClr val="8E8780"/>
+                </a:solidFill>
+              </a:rPr>
+              <a:t>WEDDING</a:t>
+            </a:r>
+          </a:p>
+        </p:txBody>
+      </p:sp>
+      <p:sp>
+        <p:nvSpPr>
+          <p:cNvPr id="2" name="Title 1"/>
+          <p:cNvSpPr>
+            <a:spLocks noGrp="1"/>
+          </p:cNvSpPr>
+          <p:nvPr>
+            <p:ph type="title"/>
+          </p:nvPr>
+        </p:nvSpPr>
+        <p:spPr>
+          <a:xfrm>
+            <a:off x="1371600" y="640080"/>
+            <a:ext cx="9448495" cy="868680"/>
+          </a:xfrm>
+        </p:spPr>
+        <p:txBody>
+          <a:bodyPr wrap="square" lIns="54864" rIns="54864" tIns="27432" bIns="27432" anchor="ctr">
+            <a:noAutofit/>
+          </a:bodyPr>
+          <a:lstStyle/>
+          <a:p>
+            <a:pPr algn="ctr">
               <a:lnSpc>
                 <a:spcPct val="105000"/>
               </a:lnSpc>
@@ -3534,7 +3695,7 @@
             <a:r>
               <a:rPr sz="3000" b="1" i="0">
                 <a:solidFill>
-                  <a:srgbClr val="3A2918"/>
+                  <a:srgbClr val="26231F"/>
                 </a:solidFill>
               </a:rPr>
               <a:t>신랑 · 신부 소개</a:t>
@@ -3544,25 +3705,23 @@
       </p:sp>
       <p:sp>
         <p:nvSpPr>
-          <p:cNvPr id="4" name="사진 자리"/>
+          <p:cNvPr id="6" name="사진 자리"/>
           <p:cNvSpPr/>
           <p:nvPr/>
         </p:nvSpPr>
         <p:spPr>
           <a:xfrm>
-            <a:off x="2042083" y="1554480"/>
-            <a:ext cx="2331720" cy="2331720"/>
+            <a:off x="1996363" y="1783080"/>
+            <a:ext cx="2286000" cy="2286000"/>
           </a:xfrm>
           <a:prstGeom prst="ellipse">
             <a:avLst/>
           </a:prstGeom>
           <a:solidFill>
-            <a:srgbClr val="EFE0D2"/>
+            <a:srgbClr val="F6E6D5"/>
           </a:solidFill>
           <a:ln w="19050">
-            <a:solidFill>
-              <a:srgbClr val="7B5732"/>
-            </a:solidFill>
+            <a:noFill/>
             <a:prstDash val="dash"/>
           </a:ln>
         </p:spPr>
@@ -3580,7 +3739,7 @@
             <a:r>
               <a:rPr sz="1200" b="0" i="0">
                 <a:solidFill>
-                  <a:srgbClr val="3A2918"/>
+                  <a:srgbClr val="8E8780"/>
                 </a:solidFill>
               </a:rPr>
               <a:t>사진</a:t>
@@ -3590,14 +3749,14 @@
       </p:sp>
       <p:sp>
         <p:nvSpPr>
-          <p:cNvPr id="5" name="TextBox 4"/>
+          <p:cNvPr id="7" name="TextBox 6"/>
           <p:cNvSpPr txBox="1"/>
           <p:nvPr/>
         </p:nvSpPr>
         <p:spPr>
           <a:xfrm>
-            <a:off x="777240" y="3977639"/>
-            <a:ext cx="4861407" cy="411480"/>
+            <a:off x="640080" y="4160520"/>
+            <a:ext cx="4998567" cy="411480"/>
           </a:xfrm>
           <a:prstGeom prst="rect">
             <a:avLst/>
@@ -3618,7 +3777,7 @@
             <a:r>
               <a:rPr sz="1600" b="1" i="0">
                 <a:solidFill>
-                  <a:srgbClr val="3A2918"/>
+                  <a:srgbClr val="493827"/>
                 </a:solidFill>
               </a:rPr>
               <a:t>신랑</a:t>
@@ -3628,14 +3787,14 @@
       </p:sp>
       <p:sp>
         <p:nvSpPr>
-          <p:cNvPr id="6" name="TextBox 5"/>
+          <p:cNvPr id="8" name="TextBox 7"/>
           <p:cNvSpPr txBox="1"/>
           <p:nvPr/>
         </p:nvSpPr>
         <p:spPr>
           <a:xfrm>
-            <a:off x="868680" y="4434840"/>
-            <a:ext cx="4678527" cy="1783079"/>
+            <a:off x="731519" y="4617720"/>
+            <a:ext cx="4815687" cy="1737360"/>
           </a:xfrm>
           <a:prstGeom prst="rect">
             <a:avLst/>
@@ -3696,25 +3855,23 @@
       </p:sp>
       <p:sp>
         <p:nvSpPr>
-          <p:cNvPr id="7" name="사진 자리"/>
+          <p:cNvPr id="9" name="사진 자리"/>
           <p:cNvSpPr/>
           <p:nvPr/>
         </p:nvSpPr>
         <p:spPr>
           <a:xfrm>
-            <a:off x="7817891" y="1554480"/>
-            <a:ext cx="2331720" cy="2331720"/>
+            <a:off x="7909331" y="1783080"/>
+            <a:ext cx="2286000" cy="2286000"/>
           </a:xfrm>
           <a:prstGeom prst="ellipse">
             <a:avLst/>
           </a:prstGeom>
           <a:solidFill>
-            <a:srgbClr val="EFE0D2"/>
+            <a:srgbClr val="F6E6D5"/>
           </a:solidFill>
           <a:ln w="19050">
-            <a:solidFill>
-              <a:srgbClr val="7B5732"/>
-            </a:solidFill>
+            <a:noFill/>
             <a:prstDash val="dash"/>
           </a:ln>
         </p:spPr>
@@ -3732,7 +3889,7 @@
             <a:r>
               <a:rPr sz="1200" b="0" i="0">
                 <a:solidFill>
-                  <a:srgbClr val="3A2918"/>
+                  <a:srgbClr val="8E8780"/>
                 </a:solidFill>
               </a:rPr>
               <a:t>사진</a:t>
@@ -3742,14 +3899,14 @@
       </p:sp>
       <p:sp>
         <p:nvSpPr>
-          <p:cNvPr id="8" name="TextBox 7"/>
+          <p:cNvPr id="10" name="TextBox 9"/>
           <p:cNvSpPr txBox="1"/>
           <p:nvPr/>
         </p:nvSpPr>
         <p:spPr>
           <a:xfrm>
-            <a:off x="6553047" y="3977639"/>
-            <a:ext cx="4861407" cy="411480"/>
+            <a:off x="6553047" y="4160520"/>
+            <a:ext cx="4998567" cy="411480"/>
           </a:xfrm>
           <a:prstGeom prst="rect">
             <a:avLst/>
@@ -3770,7 +3927,7 @@
             <a:r>
               <a:rPr sz="1600" b="1" i="0">
                 <a:solidFill>
-                  <a:srgbClr val="3A2918"/>
+                  <a:srgbClr val="493827"/>
                 </a:solidFill>
               </a:rPr>
               <a:t>신부</a:t>
@@ -3780,14 +3937,14 @@
       </p:sp>
       <p:sp>
         <p:nvSpPr>
-          <p:cNvPr id="9" name="TextBox 8"/>
+          <p:cNvPr id="11" name="TextBox 10"/>
           <p:cNvSpPr txBox="1"/>
           <p:nvPr/>
         </p:nvSpPr>
         <p:spPr>
           <a:xfrm>
-            <a:off x="6644487" y="4434840"/>
-            <a:ext cx="4678527" cy="1783079"/>
+            <a:off x="6644487" y="4617720"/>
+            <a:ext cx="4815687" cy="1737360"/>
           </a:xfrm>
           <a:prstGeom prst="rect">
             <a:avLst/>
@@ -3860,7 +4017,7 @@
     <p:bg>
       <p:bgPr>
         <a:solidFill>
-          <a:srgbClr val="EFE0D2"/>
+          <a:srgbClr val="FBF4EC"/>
         </a:solidFill>
         <a:effectLst/>
       </p:bgPr>
@@ -3874,26 +4031,52 @@
       <p:grpSpPr/>
       <p:sp>
         <p:nvSpPr>
-          <p:cNvPr id="3" name="장식"/>
+          <p:cNvPr id="3" name="포인트"/>
           <p:cNvSpPr/>
           <p:nvPr/>
         </p:nvSpPr>
         <p:spPr>
           <a:xfrm>
-            <a:off x="274320" y="274320"/>
-            <a:ext cx="11643055" cy="6309360"/>
+            <a:off x="5958687" y="246888"/>
+            <a:ext cx="274320" cy="109728"/>
+          </a:xfrm>
+          <a:prstGeom prst="wave">
+            <a:avLst/>
+          </a:prstGeom>
+          <a:solidFill>
+            <a:srgbClr val="D8A879"/>
+          </a:solidFill>
+          <a:ln>
+            <a:noFill/>
+          </a:ln>
+        </p:spPr>
+        <p:txBody>
+          <a:bodyPr rtlCol="0" anchor="ctr"/>
+          <a:lstStyle/>
+          <a:p>
+            <a:pPr algn="ctr"/>
+          </a:p>
+        </p:txBody>
+      </p:sp>
+      <p:sp>
+        <p:nvSpPr>
+          <p:cNvPr id="4" name="장식"/>
+          <p:cNvSpPr/>
+          <p:nvPr/>
+        </p:nvSpPr>
+        <p:spPr>
+          <a:xfrm>
+            <a:off x="5684367" y="1572768"/>
+            <a:ext cx="822960" cy="22860"/>
           </a:xfrm>
           <a:prstGeom prst="rect">
             <a:avLst/>
           </a:prstGeom>
           <a:solidFill>
-            <a:srgbClr val="FFFFFF"/>
+            <a:srgbClr val="D8A879"/>
           </a:solidFill>
-          <a:ln w="25400">
-            <a:solidFill>
-              <a:srgbClr val="7B5732"/>
-            </a:solidFill>
-            <a:prstDash val="dash"/>
+          <a:ln>
+            <a:noFill/>
           </a:ln>
         </p:spPr>
         <p:txBody>
@@ -3906,19 +4089,19 @@
       </p:sp>
       <p:sp>
         <p:nvSpPr>
-          <p:cNvPr id="2" name="Title 1"/>
-          <p:cNvSpPr>
-            <a:spLocks noGrp="1"/>
-          </p:cNvSpPr>
-          <p:nvPr>
-            <p:ph type="title"/>
-          </p:nvPr>
-        </p:nvSpPr>
-        <p:spPr>
-          <a:xfrm>
-            <a:off x="777240" y="548640"/>
-            <a:ext cx="9357055" cy="822960"/>
-          </a:xfrm>
+          <p:cNvPr id="5" name="상단 라벨"/>
+          <p:cNvSpPr txBox="1"/>
+          <p:nvPr/>
+        </p:nvSpPr>
+        <p:spPr>
+          <a:xfrm>
+            <a:off x="640080" y="182880"/>
+            <a:ext cx="3657600" cy="274320"/>
+          </a:xfrm>
+          <a:prstGeom prst="rect">
+            <a:avLst/>
+          </a:prstGeom>
+          <a:noFill/>
         </p:spPr>
         <p:txBody>
           <a:bodyPr wrap="square" lIns="54864" rIns="54864" tIns="27432" bIns="27432" anchor="ctr">
@@ -3927,6 +4110,44 @@
           <a:lstStyle/>
           <a:p>
             <a:pPr algn="l">
+              <a:lnSpc>
+                <a:spcPct val="115000"/>
+              </a:lnSpc>
+            </a:pPr>
+            <a:r>
+              <a:rPr sz="800" b="1" i="0" spc="250">
+                <a:solidFill>
+                  <a:srgbClr val="8E8780"/>
+                </a:solidFill>
+              </a:rPr>
+              <a:t>WEDDING</a:t>
+            </a:r>
+          </a:p>
+        </p:txBody>
+      </p:sp>
+      <p:sp>
+        <p:nvSpPr>
+          <p:cNvPr id="2" name="Title 1"/>
+          <p:cNvSpPr>
+            <a:spLocks noGrp="1"/>
+          </p:cNvSpPr>
+          <p:nvPr>
+            <p:ph type="title"/>
+          </p:nvPr>
+        </p:nvSpPr>
+        <p:spPr>
+          <a:xfrm>
+            <a:off x="1371600" y="640080"/>
+            <a:ext cx="9448495" cy="868680"/>
+          </a:xfrm>
+        </p:spPr>
+        <p:txBody>
+          <a:bodyPr wrap="square" lIns="54864" rIns="54864" tIns="27432" bIns="27432" anchor="ctr">
+            <a:noAutofit/>
+          </a:bodyPr>
+          <a:lstStyle/>
+          <a:p>
+            <a:pPr algn="ctr">
               <a:lnSpc>
                 <a:spcPct val="105000"/>
               </a:lnSpc>
@@ -3934,7 +4155,7 @@
             <a:r>
               <a:rPr sz="3000" b="1" i="0">
                 <a:solidFill>
-                  <a:srgbClr val="3A2918"/>
+                  <a:srgbClr val="26231F"/>
                 </a:solidFill>
               </a:rPr>
               <a:t>감사의 말씀</a:t>
@@ -3944,26 +4165,24 @@
       </p:sp>
       <p:sp>
         <p:nvSpPr>
-          <p:cNvPr id="4" name="감사 글 칸"/>
+          <p:cNvPr id="6" name="감사 글 칸"/>
           <p:cNvSpPr/>
           <p:nvPr/>
         </p:nvSpPr>
         <p:spPr>
           <a:xfrm>
-            <a:off x="777240" y="1554480"/>
-            <a:ext cx="10637215" cy="4663440"/>
+            <a:off x="640080" y="1783080"/>
+            <a:ext cx="10911535" cy="4572000"/>
           </a:xfrm>
           <a:prstGeom prst="roundRect">
             <a:avLst>
-              <a:gd name="adj" fmla="val 8000"/>
+              <a:gd name="adj" fmla="val 7000"/>
             </a:avLst>
           </a:prstGeom>
-          <a:solidFill>
-            <a:srgbClr val="F9F5F1"/>
-          </a:solidFill>
-          <a:ln w="12700">
+          <a:noFill/>
+          <a:ln w="15875">
             <a:solidFill>
-              <a:srgbClr val="EFE0D2"/>
+              <a:srgbClr val="D8A879"/>
             </a:solidFill>
           </a:ln>
         </p:spPr>
@@ -3977,14 +4196,14 @@
       </p:sp>
       <p:sp>
         <p:nvSpPr>
-          <p:cNvPr id="5" name="감사 글"/>
+          <p:cNvPr id="7" name="감사 글"/>
           <p:cNvSpPr txBox="1"/>
           <p:nvPr/>
         </p:nvSpPr>
         <p:spPr>
           <a:xfrm>
-            <a:off x="1234440" y="1920240"/>
-            <a:ext cx="9722815" cy="3931920"/>
+            <a:off x="1097280" y="2148840"/>
+            <a:ext cx="9997135" cy="3840480"/>
           </a:xfrm>
           <a:prstGeom prst="rect">
             <a:avLst/>
@@ -4005,7 +4224,7 @@
             <a:r>
               <a:rPr sz="2000" b="0" i="0">
                 <a:solidFill>
-                  <a:srgbClr val="2B2B2B"/>
+                  <a:srgbClr val="26231F"/>
                 </a:solidFill>
               </a:rPr>
               <a:t>바쁘신 중에 와 주셔서 고맙습니다.</a:t>
@@ -4020,7 +4239,7 @@
             <a:r>
               <a:rPr sz="2000" b="0" i="0">
                 <a:solidFill>
-                  <a:srgbClr val="2B2B2B"/>
+                  <a:srgbClr val="26231F"/>
                 </a:solidFill>
               </a:rPr>
               <a:t/>
@@ -4035,7 +4254,7 @@
             <a:r>
               <a:rPr sz="2000" b="0" i="0">
                 <a:solidFill>
-                  <a:srgbClr val="2B2B2B"/>
+                  <a:srgbClr val="26231F"/>
                 </a:solidFill>
               </a:rPr>
               <a:t>보내 주신 마음 잊지 않고</a:t>
@@ -4050,7 +4269,7 @@
             <a:r>
               <a:rPr sz="2000" b="0" i="0">
                 <a:solidFill>
-                  <a:srgbClr val="2B2B2B"/>
+                  <a:srgbClr val="26231F"/>
                 </a:solidFill>
               </a:rPr>
               <a:t>잘 살겠습니다.</a:t>
@@ -4065,7 +4284,7 @@
             <a:r>
               <a:rPr sz="2000" b="0" i="0">
                 <a:solidFill>
-                  <a:srgbClr val="2B2B2B"/>
+                  <a:srgbClr val="26231F"/>
                 </a:solidFill>
               </a:rPr>
               <a:t/>
@@ -4080,7 +4299,7 @@
             <a:r>
               <a:rPr sz="2000" b="0" i="0">
                 <a:solidFill>
-                  <a:srgbClr val="2B2B2B"/>
+                  <a:srgbClr val="26231F"/>
                 </a:solidFill>
               </a:rPr>
               <a:t>신랑 · 신부 드림</a:t>
@@ -4102,7 +4321,7 @@
     <p:bg>
       <p:bgPr>
         <a:solidFill>
-          <a:srgbClr val="EFE0D2"/>
+          <a:srgbClr val="FBF4EC"/>
         </a:solidFill>
         <a:effectLst/>
       </p:bgPr>
@@ -4116,160 +4335,72 @@
       <p:grpSpPr/>
       <p:sp>
         <p:nvSpPr>
-          <p:cNvPr id="3" name="장식"/>
+          <p:cNvPr id="3" name="포인트"/>
           <p:cNvSpPr/>
           <p:nvPr/>
         </p:nvSpPr>
         <p:spPr>
           <a:xfrm>
-            <a:off x="274320" y="274320"/>
-            <a:ext cx="11643055" cy="6309360"/>
+            <a:off x="5958687" y="246888"/>
+            <a:ext cx="274320" cy="109728"/>
+          </a:xfrm>
+          <a:prstGeom prst="wave">
+            <a:avLst/>
+          </a:prstGeom>
+          <a:solidFill>
+            <a:srgbClr val="D8A879"/>
+          </a:solidFill>
+          <a:ln>
+            <a:noFill/>
+          </a:ln>
+        </p:spPr>
+        <p:txBody>
+          <a:bodyPr rtlCol="0" anchor="ctr"/>
+          <a:lstStyle/>
+          <a:p>
+            <a:pPr algn="ctr"/>
+          </a:p>
+        </p:txBody>
+      </p:sp>
+      <p:sp>
+        <p:nvSpPr>
+          <p:cNvPr id="4" name="장식"/>
+          <p:cNvSpPr/>
+          <p:nvPr/>
+        </p:nvSpPr>
+        <p:spPr>
+          <a:xfrm>
+            <a:off x="5684367" y="1572768"/>
+            <a:ext cx="822960" cy="22860"/>
           </a:xfrm>
           <a:prstGeom prst="rect">
             <a:avLst/>
           </a:prstGeom>
           <a:solidFill>
-            <a:srgbClr val="FFFFFF"/>
-          </a:solidFill>
-          <a:ln w="25400">
-            <a:solidFill>
-              <a:srgbClr val="7B5732"/>
-            </a:solidFill>
-            <a:prstDash val="dash"/>
-          </a:ln>
-        </p:spPr>
-        <p:txBody>
-          <a:bodyPr rtlCol="0" anchor="ctr"/>
-          <a:lstStyle/>
-          <a:p>
-            <a:pPr algn="ctr"/>
-          </a:p>
-        </p:txBody>
-      </p:sp>
-      <p:sp>
-        <p:nvSpPr>
-          <p:cNvPr id="2" name="Title 1"/>
-          <p:cNvSpPr>
-            <a:spLocks noGrp="1"/>
-          </p:cNvSpPr>
-          <p:nvPr>
-            <p:ph type="title"/>
-          </p:nvPr>
-        </p:nvSpPr>
-        <p:spPr>
-          <a:xfrm>
-            <a:off x="777240" y="548640"/>
-            <a:ext cx="9357055" cy="822960"/>
-          </a:xfrm>
-        </p:spPr>
-        <p:txBody>
-          <a:bodyPr wrap="square" lIns="54864" rIns="54864" tIns="27432" bIns="27432" anchor="ctr">
-            <a:noAutofit/>
-          </a:bodyPr>
-          <a:lstStyle/>
-          <a:p>
-            <a:pPr algn="l">
-              <a:lnSpc>
-                <a:spcPct val="105000"/>
-              </a:lnSpc>
-            </a:pPr>
-            <a:r>
-              <a:rPr sz="3000" b="1" i="0">
-                <a:solidFill>
-                  <a:srgbClr val="3A2918"/>
-                </a:solidFill>
-              </a:rPr>
-              <a:t>답례 안내</a:t>
-            </a:r>
-          </a:p>
-        </p:txBody>
-      </p:sp>
-      <p:sp>
-        <p:nvSpPr>
-          <p:cNvPr id="4" name="카드 1"/>
-          <p:cNvSpPr/>
-          <p:nvPr/>
-        </p:nvSpPr>
-        <p:spPr>
-          <a:xfrm>
-            <a:off x="777240" y="1554480"/>
-            <a:ext cx="3393338" cy="4663440"/>
-          </a:xfrm>
-          <a:prstGeom prst="roundRect">
-            <a:avLst>
-              <a:gd name="adj" fmla="val 8000"/>
-            </a:avLst>
-          </a:prstGeom>
-          <a:solidFill>
-            <a:srgbClr val="F9F5F1"/>
-          </a:solidFill>
-          <a:ln w="15875">
-            <a:solidFill>
-              <a:srgbClr val="EFE0D2"/>
-            </a:solidFill>
-          </a:ln>
-        </p:spPr>
-        <p:txBody>
-          <a:bodyPr rtlCol="0" anchor="ctr"/>
-          <a:lstStyle/>
-          <a:p>
-            <a:pPr algn="ctr"/>
-          </a:p>
-        </p:txBody>
-      </p:sp>
-      <p:sp>
-        <p:nvSpPr>
-          <p:cNvPr id="5" name="번호 1"/>
-          <p:cNvSpPr/>
-          <p:nvPr/>
-        </p:nvSpPr>
-        <p:spPr>
-          <a:xfrm>
-            <a:off x="960120" y="1737360"/>
-            <a:ext cx="457200" cy="457200"/>
-          </a:xfrm>
-          <a:prstGeom prst="ellipse">
-            <a:avLst/>
-          </a:prstGeom>
-          <a:solidFill>
-            <a:srgbClr val="7B5732"/>
+            <a:srgbClr val="D8A879"/>
           </a:solidFill>
           <a:ln>
             <a:noFill/>
           </a:ln>
         </p:spPr>
         <p:txBody>
-          <a:bodyPr rtlCol="0" anchor="ctr" wrap="square" lIns="54864" rIns="54864" tIns="27432" bIns="27432">
-            <a:noAutofit/>
-          </a:bodyPr>
-          <a:lstStyle/>
-          <a:p>
-            <a:pPr algn="ctr">
-              <a:lnSpc>
-                <a:spcPct val="100000"/>
-              </a:lnSpc>
-            </a:pPr>
-            <a:r>
-              <a:rPr sz="1600" b="1" i="0">
-                <a:solidFill>
-                  <a:srgbClr val="FFFFFF"/>
-                </a:solidFill>
-              </a:rPr>
-              <a:t>1</a:t>
-            </a:r>
-          </a:p>
-        </p:txBody>
-      </p:sp>
-      <p:sp>
-        <p:nvSpPr>
-          <p:cNvPr id="6" name="TextBox 5"/>
+          <a:bodyPr rtlCol="0" anchor="ctr"/>
+          <a:lstStyle/>
+          <a:p>
+            <a:pPr algn="ctr"/>
+          </a:p>
+        </p:txBody>
+      </p:sp>
+      <p:sp>
+        <p:nvSpPr>
+          <p:cNvPr id="5" name="상단 라벨"/>
           <p:cNvSpPr txBox="1"/>
           <p:nvPr/>
         </p:nvSpPr>
         <p:spPr>
           <a:xfrm>
-            <a:off x="914400" y="2331720"/>
-            <a:ext cx="3119018" cy="640080"/>
+            <a:off x="640080" y="182880"/>
+            <a:ext cx="3657600" cy="274320"/>
           </a:xfrm>
           <a:prstGeom prst="rect">
             <a:avLst/>
@@ -4288,9 +4419,154 @@
               </a:lnSpc>
             </a:pPr>
             <a:r>
+              <a:rPr sz="800" b="1" i="0" spc="250">
+                <a:solidFill>
+                  <a:srgbClr val="8E8780"/>
+                </a:solidFill>
+              </a:rPr>
+              <a:t>WEDDING</a:t>
+            </a:r>
+          </a:p>
+        </p:txBody>
+      </p:sp>
+      <p:sp>
+        <p:nvSpPr>
+          <p:cNvPr id="2" name="Title 1"/>
+          <p:cNvSpPr>
+            <a:spLocks noGrp="1"/>
+          </p:cNvSpPr>
+          <p:nvPr>
+            <p:ph type="title"/>
+          </p:nvPr>
+        </p:nvSpPr>
+        <p:spPr>
+          <a:xfrm>
+            <a:off x="1371600" y="640080"/>
+            <a:ext cx="9448495" cy="868680"/>
+          </a:xfrm>
+        </p:spPr>
+        <p:txBody>
+          <a:bodyPr wrap="square" lIns="54864" rIns="54864" tIns="27432" bIns="27432" anchor="ctr">
+            <a:noAutofit/>
+          </a:bodyPr>
+          <a:lstStyle/>
+          <a:p>
+            <a:pPr algn="ctr">
+              <a:lnSpc>
+                <a:spcPct val="105000"/>
+              </a:lnSpc>
+            </a:pPr>
+            <a:r>
+              <a:rPr sz="3000" b="1" i="0">
+                <a:solidFill>
+                  <a:srgbClr val="26231F"/>
+                </a:solidFill>
+              </a:rPr>
+              <a:t>답례 안내</a:t>
+            </a:r>
+          </a:p>
+        </p:txBody>
+      </p:sp>
+      <p:sp>
+        <p:nvSpPr>
+          <p:cNvPr id="6" name="카드 1"/>
+          <p:cNvSpPr/>
+          <p:nvPr/>
+        </p:nvSpPr>
+        <p:spPr>
+          <a:xfrm>
+            <a:off x="640080" y="1783080"/>
+            <a:ext cx="3484778" cy="4572000"/>
+          </a:xfrm>
+          <a:prstGeom prst="roundRect">
+            <a:avLst>
+              <a:gd name="adj" fmla="val 7000"/>
+            </a:avLst>
+          </a:prstGeom>
+          <a:noFill/>
+          <a:ln w="15875">
+            <a:solidFill>
+              <a:srgbClr val="D8A879"/>
+            </a:solidFill>
+          </a:ln>
+        </p:spPr>
+        <p:txBody>
+          <a:bodyPr rtlCol="0" anchor="ctr"/>
+          <a:lstStyle/>
+          <a:p>
+            <a:pPr algn="ctr"/>
+          </a:p>
+        </p:txBody>
+      </p:sp>
+      <p:sp>
+        <p:nvSpPr>
+          <p:cNvPr id="7" name="번호 1"/>
+          <p:cNvSpPr txBox="1"/>
+          <p:nvPr/>
+        </p:nvSpPr>
+        <p:spPr>
+          <a:xfrm>
+            <a:off x="731519" y="1920240"/>
+            <a:ext cx="914400" cy="548640"/>
+          </a:xfrm>
+          <a:prstGeom prst="rect">
+            <a:avLst/>
+          </a:prstGeom>
+          <a:noFill/>
+        </p:spPr>
+        <p:txBody>
+          <a:bodyPr wrap="square" lIns="54864" rIns="54864" tIns="27432" bIns="27432" anchor="ctr">
+            <a:noAutofit/>
+          </a:bodyPr>
+          <a:lstStyle/>
+          <a:p>
+            <a:pPr algn="l">
+              <a:lnSpc>
+                <a:spcPct val="115000"/>
+              </a:lnSpc>
+            </a:pPr>
+            <a:r>
+              <a:rPr sz="2400" b="1" i="0">
+                <a:solidFill>
+                  <a:srgbClr val="D8A879"/>
+                </a:solidFill>
+              </a:rPr>
+              <a:t>01</a:t>
+            </a:r>
+          </a:p>
+        </p:txBody>
+      </p:sp>
+      <p:sp>
+        <p:nvSpPr>
+          <p:cNvPr id="8" name="TextBox 7"/>
+          <p:cNvSpPr txBox="1"/>
+          <p:nvPr/>
+        </p:nvSpPr>
+        <p:spPr>
+          <a:xfrm>
+            <a:off x="777240" y="2560320"/>
+            <a:ext cx="3210458" cy="640080"/>
+          </a:xfrm>
+          <a:prstGeom prst="rect">
+            <a:avLst/>
+          </a:prstGeom>
+          <a:noFill/>
+        </p:spPr>
+        <p:txBody>
+          <a:bodyPr wrap="square" lIns="54864" rIns="54864" tIns="27432" bIns="27432" anchor="ctr">
+            <a:noAutofit/>
+          </a:bodyPr>
+          <a:lstStyle/>
+          <a:p>
+            <a:pPr algn="l">
+              <a:lnSpc>
+                <a:spcPct val="115000"/>
+              </a:lnSpc>
+            </a:pPr>
+            <a:r>
               <a:rPr sz="1800" b="1" i="0">
                 <a:solidFill>
-                  <a:srgbClr val="3A2918"/>
+                  <a:srgbClr val="493827"/>
                 </a:solidFill>
               </a:rPr>
               <a:t>답례품</a:t>
@@ -4300,14 +4576,14 @@
       </p:sp>
       <p:sp>
         <p:nvSpPr>
-          <p:cNvPr id="7" name="TextBox 6"/>
+          <p:cNvPr id="9" name="TextBox 8"/>
           <p:cNvSpPr txBox="1"/>
           <p:nvPr/>
         </p:nvSpPr>
         <p:spPr>
           <a:xfrm>
-            <a:off x="914400" y="3017520"/>
-            <a:ext cx="3119018" cy="3063239"/>
+            <a:off x="777240" y="3246120"/>
+            <a:ext cx="3210458" cy="2971800"/>
           </a:xfrm>
           <a:prstGeom prst="rect">
             <a:avLst/>
@@ -4328,7 +4604,7 @@
             <a:r>
               <a:rPr sz="1500" b="0" i="0">
                 <a:solidFill>
-                  <a:srgbClr val="2B2B2B"/>
+                  <a:srgbClr val="26231F"/>
                 </a:solidFill>
               </a:rPr>
               <a:t>입력하세요</a:t>
@@ -4338,26 +4614,24 @@
       </p:sp>
       <p:sp>
         <p:nvSpPr>
-          <p:cNvPr id="8" name="카드 2"/>
+          <p:cNvPr id="10" name="카드 2"/>
           <p:cNvSpPr/>
           <p:nvPr/>
         </p:nvSpPr>
         <p:spPr>
           <a:xfrm>
-            <a:off x="4399178" y="1554480"/>
-            <a:ext cx="3393338" cy="4663440"/>
+            <a:off x="4353458" y="1783080"/>
+            <a:ext cx="3484778" cy="4572000"/>
           </a:xfrm>
           <a:prstGeom prst="roundRect">
             <a:avLst>
-              <a:gd name="adj" fmla="val 8000"/>
+              <a:gd name="adj" fmla="val 7000"/>
             </a:avLst>
           </a:prstGeom>
-          <a:solidFill>
-            <a:srgbClr val="F9F5F1"/>
-          </a:solidFill>
+          <a:noFill/>
           <a:ln w="15875">
             <a:solidFill>
-              <a:srgbClr val="EFE0D2"/>
+              <a:srgbClr val="D8A879"/>
             </a:solidFill>
           </a:ln>
         </p:spPr>
@@ -4371,57 +4645,14 @@
       </p:sp>
       <p:sp>
         <p:nvSpPr>
-          <p:cNvPr id="9" name="번호 2"/>
-          <p:cNvSpPr/>
-          <p:nvPr/>
-        </p:nvSpPr>
-        <p:spPr>
-          <a:xfrm>
-            <a:off x="4582058" y="1737360"/>
-            <a:ext cx="457200" cy="457200"/>
-          </a:xfrm>
-          <a:prstGeom prst="ellipse">
-            <a:avLst/>
-          </a:prstGeom>
-          <a:solidFill>
-            <a:srgbClr val="7B5732"/>
-          </a:solidFill>
-          <a:ln>
-            <a:noFill/>
-          </a:ln>
-        </p:spPr>
-        <p:txBody>
-          <a:bodyPr rtlCol="0" anchor="ctr" wrap="square" lIns="54864" rIns="54864" tIns="27432" bIns="27432">
-            <a:noAutofit/>
-          </a:bodyPr>
-          <a:lstStyle/>
-          <a:p>
-            <a:pPr algn="ctr">
-              <a:lnSpc>
-                <a:spcPct val="100000"/>
-              </a:lnSpc>
-            </a:pPr>
-            <a:r>
-              <a:rPr sz="1600" b="1" i="0">
-                <a:solidFill>
-                  <a:srgbClr val="FFFFFF"/>
-                </a:solidFill>
-              </a:rPr>
-              <a:t>2</a:t>
-            </a:r>
-          </a:p>
-        </p:txBody>
-      </p:sp>
-      <p:sp>
-        <p:nvSpPr>
-          <p:cNvPr id="10" name="TextBox 9"/>
+          <p:cNvPr id="11" name="번호 2"/>
           <p:cNvSpPr txBox="1"/>
           <p:nvPr/>
         </p:nvSpPr>
         <p:spPr>
           <a:xfrm>
-            <a:off x="4536338" y="2331720"/>
-            <a:ext cx="3119018" cy="640080"/>
+            <a:off x="4444898" y="1920240"/>
+            <a:ext cx="914400" cy="548640"/>
           </a:xfrm>
           <a:prstGeom prst="rect">
             <a:avLst/>
@@ -4440,9 +4671,47 @@
               </a:lnSpc>
             </a:pPr>
             <a:r>
+              <a:rPr sz="2400" b="1" i="0">
+                <a:solidFill>
+                  <a:srgbClr val="D8A879"/>
+                </a:solidFill>
+              </a:rPr>
+              <a:t>02</a:t>
+            </a:r>
+          </a:p>
+        </p:txBody>
+      </p:sp>
+      <p:sp>
+        <p:nvSpPr>
+          <p:cNvPr id="12" name="TextBox 11"/>
+          <p:cNvSpPr txBox="1"/>
+          <p:nvPr/>
+        </p:nvSpPr>
+        <p:spPr>
+          <a:xfrm>
+            <a:off x="4490618" y="2560320"/>
+            <a:ext cx="3210458" cy="640080"/>
+          </a:xfrm>
+          <a:prstGeom prst="rect">
+            <a:avLst/>
+          </a:prstGeom>
+          <a:noFill/>
+        </p:spPr>
+        <p:txBody>
+          <a:bodyPr wrap="square" lIns="54864" rIns="54864" tIns="27432" bIns="27432" anchor="ctr">
+            <a:noAutofit/>
+          </a:bodyPr>
+          <a:lstStyle/>
+          <a:p>
+            <a:pPr algn="l">
+              <a:lnSpc>
+                <a:spcPct val="115000"/>
+              </a:lnSpc>
+            </a:pPr>
+            <a:r>
               <a:rPr sz="1800" b="1" i="0">
                 <a:solidFill>
-                  <a:srgbClr val="3A2918"/>
+                  <a:srgbClr val="493827"/>
                 </a:solidFill>
               </a:rPr>
               <a:t>방명록</a:t>
@@ -4452,14 +4721,14 @@
       </p:sp>
       <p:sp>
         <p:nvSpPr>
-          <p:cNvPr id="11" name="TextBox 10"/>
+          <p:cNvPr id="13" name="TextBox 12"/>
           <p:cNvSpPr txBox="1"/>
           <p:nvPr/>
         </p:nvSpPr>
         <p:spPr>
           <a:xfrm>
-            <a:off x="4536338" y="3017520"/>
-            <a:ext cx="3119018" cy="3063239"/>
+            <a:off x="4490618" y="3246120"/>
+            <a:ext cx="3210458" cy="2971800"/>
           </a:xfrm>
           <a:prstGeom prst="rect">
             <a:avLst/>
@@ -4480,7 +4749,7 @@
             <a:r>
               <a:rPr sz="1500" b="0" i="0">
                 <a:solidFill>
-                  <a:srgbClr val="2B2B2B"/>
+                  <a:srgbClr val="26231F"/>
                 </a:solidFill>
               </a:rPr>
               <a:t>입력하세요</a:t>
@@ -4490,26 +4759,24 @@
       </p:sp>
       <p:sp>
         <p:nvSpPr>
-          <p:cNvPr id="12" name="카드 3"/>
+          <p:cNvPr id="14" name="카드 3"/>
           <p:cNvSpPr/>
           <p:nvPr/>
         </p:nvSpPr>
         <p:spPr>
           <a:xfrm>
-            <a:off x="8021116" y="1554480"/>
-            <a:ext cx="3393338" cy="4663440"/>
+            <a:off x="8066836" y="1783080"/>
+            <a:ext cx="3484778" cy="4572000"/>
           </a:xfrm>
           <a:prstGeom prst="roundRect">
             <a:avLst>
-              <a:gd name="adj" fmla="val 8000"/>
+              <a:gd name="adj" fmla="val 7000"/>
             </a:avLst>
           </a:prstGeom>
-          <a:solidFill>
-            <a:srgbClr val="F9F5F1"/>
-          </a:solidFill>
+          <a:noFill/>
           <a:ln w="15875">
             <a:solidFill>
-              <a:srgbClr val="EFE0D2"/>
+              <a:srgbClr val="D8A879"/>
             </a:solidFill>
           </a:ln>
         </p:spPr>
@@ -4523,57 +4790,14 @@
       </p:sp>
       <p:sp>
         <p:nvSpPr>
-          <p:cNvPr id="13" name="번호 3"/>
-          <p:cNvSpPr/>
-          <p:nvPr/>
-        </p:nvSpPr>
-        <p:spPr>
-          <a:xfrm>
-            <a:off x="8203996" y="1737360"/>
-            <a:ext cx="457200" cy="457200"/>
-          </a:xfrm>
-          <a:prstGeom prst="ellipse">
-            <a:avLst/>
-          </a:prstGeom>
-          <a:solidFill>
-            <a:srgbClr val="7B5732"/>
-          </a:solidFill>
-          <a:ln>
-            <a:noFill/>
-          </a:ln>
-        </p:spPr>
-        <p:txBody>
-          <a:bodyPr rtlCol="0" anchor="ctr" wrap="square" lIns="54864" rIns="54864" tIns="27432" bIns="27432">
-            <a:noAutofit/>
-          </a:bodyPr>
-          <a:lstStyle/>
-          <a:p>
-            <a:pPr algn="ctr">
-              <a:lnSpc>
-                <a:spcPct val="100000"/>
-              </a:lnSpc>
-            </a:pPr>
-            <a:r>
-              <a:rPr sz="1600" b="1" i="0">
-                <a:solidFill>
-                  <a:srgbClr val="FFFFFF"/>
-                </a:solidFill>
-              </a:rPr>
-              <a:t>3</a:t>
-            </a:r>
-          </a:p>
-        </p:txBody>
-      </p:sp>
-      <p:sp>
-        <p:nvSpPr>
-          <p:cNvPr id="14" name="TextBox 13"/>
+          <p:cNvPr id="15" name="번호 3"/>
           <p:cNvSpPr txBox="1"/>
           <p:nvPr/>
         </p:nvSpPr>
         <p:spPr>
           <a:xfrm>
-            <a:off x="8158276" y="2331720"/>
-            <a:ext cx="3119018" cy="640080"/>
+            <a:off x="8158276" y="1920240"/>
+            <a:ext cx="914400" cy="548640"/>
           </a:xfrm>
           <a:prstGeom prst="rect">
             <a:avLst/>
@@ -4592,9 +4816,47 @@
               </a:lnSpc>
             </a:pPr>
             <a:r>
+              <a:rPr sz="2400" b="1" i="0">
+                <a:solidFill>
+                  <a:srgbClr val="D8A879"/>
+                </a:solidFill>
+              </a:rPr>
+              <a:t>03</a:t>
+            </a:r>
+          </a:p>
+        </p:txBody>
+      </p:sp>
+      <p:sp>
+        <p:nvSpPr>
+          <p:cNvPr id="16" name="TextBox 15"/>
+          <p:cNvSpPr txBox="1"/>
+          <p:nvPr/>
+        </p:nvSpPr>
+        <p:spPr>
+          <a:xfrm>
+            <a:off x="8203996" y="2560320"/>
+            <a:ext cx="3210458" cy="640080"/>
+          </a:xfrm>
+          <a:prstGeom prst="rect">
+            <a:avLst/>
+          </a:prstGeom>
+          <a:noFill/>
+        </p:spPr>
+        <p:txBody>
+          <a:bodyPr wrap="square" lIns="54864" rIns="54864" tIns="27432" bIns="27432" anchor="ctr">
+            <a:noAutofit/>
+          </a:bodyPr>
+          <a:lstStyle/>
+          <a:p>
+            <a:pPr algn="l">
+              <a:lnSpc>
+                <a:spcPct val="115000"/>
+              </a:lnSpc>
+            </a:pPr>
+            <a:r>
               <a:rPr sz="1800" b="1" i="0">
                 <a:solidFill>
-                  <a:srgbClr val="3A2918"/>
+                  <a:srgbClr val="493827"/>
                 </a:solidFill>
               </a:rPr>
               <a:t>사진 · 영상</a:t>
@@ -4604,14 +4866,14 @@
       </p:sp>
       <p:sp>
         <p:nvSpPr>
-          <p:cNvPr id="15" name="TextBox 14"/>
+          <p:cNvPr id="17" name="TextBox 16"/>
           <p:cNvSpPr txBox="1"/>
           <p:nvPr/>
         </p:nvSpPr>
         <p:spPr>
           <a:xfrm>
-            <a:off x="8158276" y="3017520"/>
-            <a:ext cx="3119018" cy="3063239"/>
+            <a:off x="8203996" y="3246120"/>
+            <a:ext cx="3210458" cy="2971800"/>
           </a:xfrm>
           <a:prstGeom prst="rect">
             <a:avLst/>
@@ -4632,7 +4894,7 @@
             <a:r>
               <a:rPr sz="1500" b="0" i="0">
                 <a:solidFill>
-                  <a:srgbClr val="2B2B2B"/>
+                  <a:srgbClr val="26231F"/>
                 </a:solidFill>
               </a:rPr>
               <a:t>입력하세요</a:t>
@@ -4654,7 +4916,7 @@
     <p:bg>
       <p:bgPr>
         <a:solidFill>
-          <a:srgbClr val="EFE0D2"/>
+          <a:srgbClr val="FBF4EC"/>
         </a:solidFill>
         <a:effectLst/>
       </p:bgPr>
@@ -4668,26 +4930,52 @@
       <p:grpSpPr/>
       <p:sp>
         <p:nvSpPr>
-          <p:cNvPr id="3" name="장식"/>
+          <p:cNvPr id="3" name="포인트"/>
           <p:cNvSpPr/>
           <p:nvPr/>
         </p:nvSpPr>
         <p:spPr>
           <a:xfrm>
-            <a:off x="274320" y="274320"/>
-            <a:ext cx="11643055" cy="6309360"/>
+            <a:off x="5958687" y="246888"/>
+            <a:ext cx="274320" cy="109728"/>
+          </a:xfrm>
+          <a:prstGeom prst="wave">
+            <a:avLst/>
+          </a:prstGeom>
+          <a:solidFill>
+            <a:srgbClr val="D8A879"/>
+          </a:solidFill>
+          <a:ln>
+            <a:noFill/>
+          </a:ln>
+        </p:spPr>
+        <p:txBody>
+          <a:bodyPr rtlCol="0" anchor="ctr"/>
+          <a:lstStyle/>
+          <a:p>
+            <a:pPr algn="ctr"/>
+          </a:p>
+        </p:txBody>
+      </p:sp>
+      <p:sp>
+        <p:nvSpPr>
+          <p:cNvPr id="4" name="장식"/>
+          <p:cNvSpPr/>
+          <p:nvPr/>
+        </p:nvSpPr>
+        <p:spPr>
+          <a:xfrm>
+            <a:off x="5684367" y="1572768"/>
+            <a:ext cx="822960" cy="22860"/>
           </a:xfrm>
           <a:prstGeom prst="rect">
             <a:avLst/>
           </a:prstGeom>
           <a:solidFill>
-            <a:srgbClr val="FFFFFF"/>
+            <a:srgbClr val="D8A879"/>
           </a:solidFill>
-          <a:ln w="25400">
-            <a:solidFill>
-              <a:srgbClr val="7B5732"/>
-            </a:solidFill>
-            <a:prstDash val="dash"/>
+          <a:ln>
+            <a:noFill/>
           </a:ln>
         </p:spPr>
         <p:txBody>
@@ -4700,19 +4988,19 @@
       </p:sp>
       <p:sp>
         <p:nvSpPr>
-          <p:cNvPr id="2" name="Title 1"/>
-          <p:cNvSpPr>
-            <a:spLocks noGrp="1"/>
-          </p:cNvSpPr>
-          <p:nvPr>
-            <p:ph type="title"/>
-          </p:nvPr>
-        </p:nvSpPr>
-        <p:spPr>
-          <a:xfrm>
-            <a:off x="777240" y="548640"/>
-            <a:ext cx="9357055" cy="822960"/>
-          </a:xfrm>
+          <p:cNvPr id="5" name="상단 라벨"/>
+          <p:cNvSpPr txBox="1"/>
+          <p:nvPr/>
+        </p:nvSpPr>
+        <p:spPr>
+          <a:xfrm>
+            <a:off x="640080" y="182880"/>
+            <a:ext cx="3657600" cy="274320"/>
+          </a:xfrm>
+          <a:prstGeom prst="rect">
+            <a:avLst/>
+          </a:prstGeom>
+          <a:noFill/>
         </p:spPr>
         <p:txBody>
           <a:bodyPr wrap="square" lIns="54864" rIns="54864" tIns="27432" bIns="27432" anchor="ctr">
@@ -4721,6 +5009,44 @@
           <a:lstStyle/>
           <a:p>
             <a:pPr algn="l">
+              <a:lnSpc>
+                <a:spcPct val="115000"/>
+              </a:lnSpc>
+            </a:pPr>
+            <a:r>
+              <a:rPr sz="800" b="1" i="0" spc="250">
+                <a:solidFill>
+                  <a:srgbClr val="8E8780"/>
+                </a:solidFill>
+              </a:rPr>
+              <a:t>WEDDING</a:t>
+            </a:r>
+          </a:p>
+        </p:txBody>
+      </p:sp>
+      <p:sp>
+        <p:nvSpPr>
+          <p:cNvPr id="2" name="Title 1"/>
+          <p:cNvSpPr>
+            <a:spLocks noGrp="1"/>
+          </p:cNvSpPr>
+          <p:nvPr>
+            <p:ph type="title"/>
+          </p:nvPr>
+        </p:nvSpPr>
+        <p:spPr>
+          <a:xfrm>
+            <a:off x="1371600" y="640080"/>
+            <a:ext cx="9448495" cy="868680"/>
+          </a:xfrm>
+        </p:spPr>
+        <p:txBody>
+          <a:bodyPr wrap="square" lIns="54864" rIns="54864" tIns="27432" bIns="27432" anchor="ctr">
+            <a:noAutofit/>
+          </a:bodyPr>
+          <a:lstStyle/>
+          <a:p>
+            <a:pPr algn="ctr">
               <a:lnSpc>
                 <a:spcPct val="105000"/>
               </a:lnSpc>
@@ -4728,7 +5054,7 @@
             <a:r>
               <a:rPr sz="3000" b="1" i="0">
                 <a:solidFill>
-                  <a:srgbClr val="3A2918"/>
+                  <a:srgbClr val="26231F"/>
                 </a:solidFill>
               </a:rPr>
               <a:t>웨딩 사진</a:t>
@@ -4738,14 +5064,14 @@
       </p:sp>
       <p:sp>
         <p:nvSpPr>
-          <p:cNvPr id="4" name="사진 자리"/>
+          <p:cNvPr id="6" name="사진 자리"/>
           <p:cNvSpPr/>
           <p:nvPr/>
         </p:nvSpPr>
         <p:spPr>
           <a:xfrm>
-            <a:off x="777240" y="1554480"/>
-            <a:ext cx="3423818" cy="2240279"/>
+            <a:off x="640080" y="1783080"/>
+            <a:ext cx="3515258" cy="2194560"/>
           </a:xfrm>
           <a:prstGeom prst="roundRect">
             <a:avLst>
@@ -4753,12 +5079,10 @@
             </a:avLst>
           </a:prstGeom>
           <a:solidFill>
-            <a:srgbClr val="EFE0D2"/>
+            <a:srgbClr val="F6E6D5"/>
           </a:solidFill>
           <a:ln w="19050">
-            <a:solidFill>
-              <a:srgbClr val="7B5732"/>
-            </a:solidFill>
+            <a:noFill/>
             <a:prstDash val="dash"/>
           </a:ln>
         </p:spPr>
@@ -4776,7 +5100,7 @@
             <a:r>
               <a:rPr sz="1200" b="0" i="0">
                 <a:solidFill>
-                  <a:srgbClr val="3A2918"/>
+                  <a:srgbClr val="8E8780"/>
                 </a:solidFill>
               </a:rPr>
               <a:t>사진 1</a:t>
@@ -4786,14 +5110,14 @@
       </p:sp>
       <p:sp>
         <p:nvSpPr>
-          <p:cNvPr id="5" name="사진 자리"/>
+          <p:cNvPr id="7" name="사진 자리"/>
           <p:cNvSpPr/>
           <p:nvPr/>
         </p:nvSpPr>
         <p:spPr>
           <a:xfrm>
-            <a:off x="4383938" y="1554480"/>
-            <a:ext cx="3423818" cy="2240279"/>
+            <a:off x="4338218" y="1783080"/>
+            <a:ext cx="3515258" cy="2194560"/>
           </a:xfrm>
           <a:prstGeom prst="roundRect">
             <a:avLst>
@@ -4801,12 +5125,10 @@
             </a:avLst>
           </a:prstGeom>
           <a:solidFill>
-            <a:srgbClr val="EFE0D2"/>
+            <a:srgbClr val="F6E6D5"/>
           </a:solidFill>
           <a:ln w="19050">
-            <a:solidFill>
-              <a:srgbClr val="7B5732"/>
-            </a:solidFill>
+            <a:noFill/>
             <a:prstDash val="dash"/>
           </a:ln>
         </p:spPr>
@@ -4824,7 +5146,7 @@
             <a:r>
               <a:rPr sz="1200" b="0" i="0">
                 <a:solidFill>
-                  <a:srgbClr val="3A2918"/>
+                  <a:srgbClr val="8E8780"/>
                 </a:solidFill>
               </a:rPr>
               <a:t>사진 2</a:t>
@@ -4834,14 +5156,14 @@
       </p:sp>
       <p:sp>
         <p:nvSpPr>
-          <p:cNvPr id="6" name="사진 자리"/>
+          <p:cNvPr id="8" name="사진 자리"/>
           <p:cNvSpPr/>
           <p:nvPr/>
         </p:nvSpPr>
         <p:spPr>
           <a:xfrm>
-            <a:off x="7990636" y="1554480"/>
-            <a:ext cx="3423818" cy="2240279"/>
+            <a:off x="8036356" y="1783080"/>
+            <a:ext cx="3515258" cy="2194560"/>
           </a:xfrm>
           <a:prstGeom prst="roundRect">
             <a:avLst>
@@ -4849,12 +5171,10 @@
             </a:avLst>
           </a:prstGeom>
           <a:solidFill>
-            <a:srgbClr val="EFE0D2"/>
+            <a:srgbClr val="F6E6D5"/>
           </a:solidFill>
           <a:ln w="19050">
-            <a:solidFill>
-              <a:srgbClr val="7B5732"/>
-            </a:solidFill>
+            <a:noFill/>
             <a:prstDash val="dash"/>
           </a:ln>
         </p:spPr>
@@ -4872,7 +5192,7 @@
             <a:r>
               <a:rPr sz="1200" b="0" i="0">
                 <a:solidFill>
-                  <a:srgbClr val="3A2918"/>
+                  <a:srgbClr val="8E8780"/>
                 </a:solidFill>
               </a:rPr>
               <a:t>사진 3</a:t>
@@ -4882,14 +5202,14 @@
       </p:sp>
       <p:sp>
         <p:nvSpPr>
-          <p:cNvPr id="7" name="사진 자리"/>
+          <p:cNvPr id="9" name="사진 자리"/>
           <p:cNvSpPr/>
           <p:nvPr/>
         </p:nvSpPr>
         <p:spPr>
           <a:xfrm>
-            <a:off x="777240" y="3977639"/>
-            <a:ext cx="3423818" cy="2240279"/>
+            <a:off x="640080" y="4160520"/>
+            <a:ext cx="3515258" cy="2194560"/>
           </a:xfrm>
           <a:prstGeom prst="roundRect">
             <a:avLst>
@@ -4897,12 +5217,10 @@
             </a:avLst>
           </a:prstGeom>
           <a:solidFill>
-            <a:srgbClr val="EFE0D2"/>
+            <a:srgbClr val="F6E6D5"/>
           </a:solidFill>
           <a:ln w="19050">
-            <a:solidFill>
-              <a:srgbClr val="7B5732"/>
-            </a:solidFill>
+            <a:noFill/>
             <a:prstDash val="dash"/>
           </a:ln>
         </p:spPr>
@@ -4920,7 +5238,7 @@
             <a:r>
               <a:rPr sz="1200" b="0" i="0">
                 <a:solidFill>
-                  <a:srgbClr val="3A2918"/>
+                  <a:srgbClr val="8E8780"/>
                 </a:solidFill>
               </a:rPr>
               <a:t>사진 4</a:t>
@@ -4930,14 +5248,14 @@
       </p:sp>
       <p:sp>
         <p:nvSpPr>
-          <p:cNvPr id="8" name="사진 자리"/>
+          <p:cNvPr id="10" name="사진 자리"/>
           <p:cNvSpPr/>
           <p:nvPr/>
         </p:nvSpPr>
         <p:spPr>
           <a:xfrm>
-            <a:off x="4383938" y="3977639"/>
-            <a:ext cx="3423818" cy="2240279"/>
+            <a:off x="4338218" y="4160520"/>
+            <a:ext cx="3515258" cy="2194560"/>
           </a:xfrm>
           <a:prstGeom prst="roundRect">
             <a:avLst>
@@ -4945,12 +5263,10 @@
             </a:avLst>
           </a:prstGeom>
           <a:solidFill>
-            <a:srgbClr val="EFE0D2"/>
+            <a:srgbClr val="F6E6D5"/>
           </a:solidFill>
           <a:ln w="19050">
-            <a:solidFill>
-              <a:srgbClr val="7B5732"/>
-            </a:solidFill>
+            <a:noFill/>
             <a:prstDash val="dash"/>
           </a:ln>
         </p:spPr>
@@ -4968,7 +5284,7 @@
             <a:r>
               <a:rPr sz="1200" b="0" i="0">
                 <a:solidFill>
-                  <a:srgbClr val="3A2918"/>
+                  <a:srgbClr val="8E8780"/>
                 </a:solidFill>
               </a:rPr>
               <a:t>사진 5</a:t>
@@ -4978,14 +5294,14 @@
       </p:sp>
       <p:sp>
         <p:nvSpPr>
-          <p:cNvPr id="9" name="사진 자리"/>
+          <p:cNvPr id="11" name="사진 자리"/>
           <p:cNvSpPr/>
           <p:nvPr/>
         </p:nvSpPr>
         <p:spPr>
           <a:xfrm>
-            <a:off x="7990636" y="3977639"/>
-            <a:ext cx="3423818" cy="2240279"/>
+            <a:off x="8036356" y="4160520"/>
+            <a:ext cx="3515258" cy="2194560"/>
           </a:xfrm>
           <a:prstGeom prst="roundRect">
             <a:avLst>
@@ -4993,12 +5309,10 @@
             </a:avLst>
           </a:prstGeom>
           <a:solidFill>
-            <a:srgbClr val="EFE0D2"/>
+            <a:srgbClr val="F6E6D5"/>
           </a:solidFill>
           <a:ln w="19050">
-            <a:solidFill>
-              <a:srgbClr val="7B5732"/>
-            </a:solidFill>
+            <a:noFill/>
             <a:prstDash val="dash"/>
           </a:ln>
         </p:spPr>
@@ -5016,7 +5330,7 @@
             <a:r>
               <a:rPr sz="1200" b="0" i="0">
                 <a:solidFill>
-                  <a:srgbClr val="3A2918"/>
+                  <a:srgbClr val="8E8780"/>
                 </a:solidFill>
               </a:rPr>
               <a:t>사진 6</a:t>
@@ -5035,6 +5349,14 @@
 <file path=ppt/slides/slide6.xml><?xml version="1.0" encoding="utf-8"?>
 <p:sld xmlns:a="http://schemas.openxmlformats.org/drawingml/2006/main" xmlns:p="http://schemas.openxmlformats.org/presentationml/2006/main" xmlns:r="http://schemas.openxmlformats.org/officeDocument/2006/relationships">
   <p:cSld>
+    <p:bg>
+      <p:bgPr>
+        <a:solidFill>
+          <a:srgbClr val="FBF4EC"/>
+        </a:solidFill>
+        <a:effectLst/>
+      </p:bgPr>
+    </p:bg>
     <p:spTree>
       <p:nvGrpSpPr>
         <p:cNvPr id="1" name=""/>
@@ -5042,30 +5364,119 @@
         <p:nvPr/>
       </p:nvGrpSpPr>
       <p:grpSpPr/>
-      <p:pic>
-        <p:nvPicPr>
-          <p:cNvPr id="3" name="표지 그림" descr="wedding-35.jpg"/>
-          <p:cNvPicPr>
-            <a:picLocks noChangeAspect="1"/>
-          </p:cNvPicPr>
+      <p:sp>
+        <p:nvSpPr>
+          <p:cNvPr id="3" name="사진 자리"/>
+          <p:cNvSpPr/>
           <p:nvPr/>
-        </p:nvPicPr>
-        <p:blipFill>
-          <a:blip r:embed="rId2"/>
-          <a:stretch>
-            <a:fillRect/>
-          </a:stretch>
-        </p:blipFill>
-        <p:spPr>
-          <a:xfrm>
-            <a:off x="0" y="0"/>
-            <a:ext cx="12191695" cy="6858000"/>
+        </p:nvSpPr>
+        <p:spPr>
+          <a:xfrm>
+            <a:off x="7558851" y="685800"/>
+            <a:ext cx="3169840" cy="5486400"/>
+          </a:xfrm>
+          <a:prstGeom prst="round2SameRect">
+            <a:avLst>
+              <a:gd name="adj1" fmla="val 50000"/>
+              <a:gd name="adj2" fmla="val 0"/>
+            </a:avLst>
+          </a:prstGeom>
+          <a:solidFill>
+            <a:srgbClr val="EBCCAD"/>
+          </a:solidFill>
+          <a:ln>
+            <a:noFill/>
+          </a:ln>
+        </p:spPr>
+        <p:txBody>
+          <a:bodyPr rtlCol="0" anchor="ctr" wrap="square" lIns="54864" rIns="54864" tIns="27432" bIns="27432">
+            <a:noAutofit/>
+          </a:bodyPr>
+          <a:lstStyle/>
+          <a:p>
+            <a:pPr algn="ctr">
+              <a:lnSpc>
+                <a:spcPct val="100000"/>
+              </a:lnSpc>
+            </a:pPr>
+            <a:r>
+              <a:rPr sz="1400" b="0" i="0">
+                <a:solidFill>
+                  <a:srgbClr val="493827"/>
+                </a:solidFill>
+              </a:rPr>
+              <a:t>사진을 넣어 주세요</a:t>
+            </a:r>
+          </a:p>
+        </p:txBody>
+      </p:sp>
+      <p:sp>
+        <p:nvSpPr>
+          <p:cNvPr id="4" name="장식"/>
+          <p:cNvSpPr/>
+          <p:nvPr/>
+        </p:nvSpPr>
+        <p:spPr>
+          <a:xfrm>
+            <a:off x="6827349" y="4251960"/>
+            <a:ext cx="1005840" cy="1005840"/>
+          </a:xfrm>
+          <a:prstGeom prst="ellipse">
+            <a:avLst/>
+          </a:prstGeom>
+          <a:solidFill>
+            <a:srgbClr val="EBCCAD"/>
+          </a:solidFill>
+          <a:ln>
+            <a:noFill/>
+          </a:ln>
+        </p:spPr>
+        <p:txBody>
+          <a:bodyPr rtlCol="0" anchor="ctr"/>
+          <a:lstStyle/>
+          <a:p>
+            <a:pPr algn="ctr"/>
+          </a:p>
+        </p:txBody>
+      </p:sp>
+      <p:sp>
+        <p:nvSpPr>
+          <p:cNvPr id="5" name="라벨"/>
+          <p:cNvSpPr txBox="1"/>
+          <p:nvPr/>
+        </p:nvSpPr>
+        <p:spPr>
+          <a:xfrm>
+            <a:off x="822960" y="2148840"/>
+            <a:ext cx="5608179" cy="274320"/>
           </a:xfrm>
           <a:prstGeom prst="rect">
             <a:avLst/>
           </a:prstGeom>
-        </p:spPr>
-      </p:pic>
+          <a:noFill/>
+        </p:spPr>
+        <p:txBody>
+          <a:bodyPr wrap="square" lIns="54864" rIns="54864" tIns="27432" bIns="27432" anchor="t">
+            <a:noAutofit/>
+          </a:bodyPr>
+          <a:lstStyle/>
+          <a:p>
+            <a:pPr algn="l">
+              <a:lnSpc>
+                <a:spcPct val="115000"/>
+              </a:lnSpc>
+            </a:pPr>
+            <a:r>
+              <a:rPr sz="1000" b="1" i="0" spc="250">
+                <a:solidFill>
+                  <a:srgbClr val="26231F"/>
+                </a:solidFill>
+              </a:rPr>
+              <a:t>WEDDING</a:t>
+            </a:r>
+          </a:p>
+        </p:txBody>
+      </p:sp>
       <p:sp>
         <p:nvSpPr>
           <p:cNvPr id="2" name="Title 1"/>
@@ -5078,8 +5489,8 @@
         </p:nvSpPr>
         <p:spPr>
           <a:xfrm>
-            <a:off x="853418" y="2057400"/>
-            <a:ext cx="6095847" cy="1554480"/>
+            <a:off x="822960" y="2606040"/>
+            <a:ext cx="5608179" cy="1188720"/>
           </a:xfrm>
         </p:spPr>
         <p:txBody>
@@ -5096,7 +5507,7 @@
             <a:r>
               <a:rPr sz="3400" b="1" i="0">
                 <a:solidFill>
-                  <a:srgbClr val="3A2918"/>
+                  <a:srgbClr val="26231F"/>
                 </a:solidFill>
               </a:rPr>
               <a:t>와 주셔서 고맙습니다</a:t>
@@ -5106,14 +5517,14 @@
       </p:sp>
       <p:sp>
         <p:nvSpPr>
-          <p:cNvPr id="4" name="한 줄 문구"/>
+          <p:cNvPr id="6" name="한 줄 문구"/>
           <p:cNvSpPr txBox="1"/>
           <p:nvPr/>
         </p:nvSpPr>
         <p:spPr>
           <a:xfrm>
-            <a:off x="853418" y="3749039"/>
-            <a:ext cx="6095847" cy="822960"/>
+            <a:off x="822960" y="3886200"/>
+            <a:ext cx="5608179" cy="822960"/>
           </a:xfrm>
           <a:prstGeom prst="rect">
             <a:avLst/>
@@ -5132,9 +5543,9 @@
               </a:lnSpc>
             </a:pPr>
             <a:r>
-              <a:rPr sz="1700" b="0" i="1">
-                <a:solidFill>
-                  <a:srgbClr val="3A2918"/>
+              <a:rPr sz="1700" b="0" i="0">
+                <a:solidFill>
+                  <a:srgbClr val="26231F"/>
                 </a:solidFill>
               </a:rPr>
               <a:t>잘 살겠습니다</a:t>
@@ -5144,14 +5555,14 @@
       </p:sp>
       <p:sp>
         <p:nvSpPr>
-          <p:cNvPr id="5" name="안내 문구"/>
+          <p:cNvPr id="7" name="안내 문구"/>
           <p:cNvSpPr txBox="1"/>
           <p:nvPr/>
         </p:nvSpPr>
         <p:spPr>
           <a:xfrm>
-            <a:off x="853418" y="4617720"/>
-            <a:ext cx="6095847" cy="914400"/>
+            <a:off x="822960" y="4754880"/>
+            <a:ext cx="5608179" cy="914400"/>
           </a:xfrm>
           <a:prstGeom prst="rect">
             <a:avLst/>
@@ -5172,7 +5583,7 @@
             <a:r>
               <a:rPr sz="1400" b="0" i="0">
                 <a:solidFill>
-                  <a:srgbClr val="666666"/>
+                  <a:srgbClr val="26231F"/>
                 </a:solidFill>
               </a:rPr>
               <a:t>신랑 이름 ♥ 신부 이름</a:t>
@@ -5199,34 +5610,34 @@
         <a:sysClr val="window" lastClr="FFFFFF"/>
       </a:lt1>
       <a:dk2>
-        <a:srgbClr val="3A2918"/>
+        <a:srgbClr val="493827"/>
       </a:dk2>
       <a:lt2>
-        <a:srgbClr val="F9F5F1"/>
+        <a:srgbClr val="FBF4EC"/>
       </a:lt2>
       <a:accent1>
-        <a:srgbClr val="7B5732"/>
+        <a:srgbClr val="D8A879"/>
       </a:accent1>
       <a:accent2>
-        <a:srgbClr val="3B9191"/>
+        <a:srgbClr val="E1DF98"/>
       </a:accent2>
       <a:accent3>
-        <a:srgbClr val="3A2918"/>
+        <a:srgbClr val="493827"/>
       </a:accent3>
       <a:accent4>
-        <a:srgbClr val="EFE0D2"/>
+        <a:srgbClr val="F6E6D5"/>
       </a:accent4>
       <a:accent5>
-        <a:srgbClr val="5B7462"/>
+        <a:srgbClr val="DCC488"/>
       </a:accent5>
       <a:accent6>
-        <a:srgbClr val="897F74"/>
+        <a:srgbClr val="92887D"/>
       </a:accent6>
       <a:hlink>
-        <a:srgbClr val="7B5732"/>
+        <a:srgbClr val="D8A879"/>
       </a:hlink>
       <a:folHlink>
-        <a:srgbClr val="3A2918"/>
+        <a:srgbClr val="493827"/>
       </a:folHlink>
     </a:clrScheme>
     <a:fontScheme name="Office">
